--- a/jin10-server/templates/plus_daily_template.pptx
+++ b/jin10-server/templates/plus_daily_template.pptx
@@ -468,7 +468,7 @@
             </a:r>
             <a:r>
               <a:rPr lang="zh-CN" altLang="en-US"/>
-              <a:t>外汇热点、精选图示、精选研报</a:t>
+              <a:t>外汇热点、精选图示、精选观点</a:t>
             </a:r>
             <a:endParaRPr lang="zh-CN" altLang="en-US"/>
           </a:p>
@@ -2359,7 +2359,7 @@
                 <a:ea typeface="思源黑体 CN Light" panose="020B0300000000000000" pitchFamily="34" charset="-128"/>
                 <a:sym typeface="+mn-ea"/>
               </a:rPr>
-              <a:t>精选研报</a:t>
+              <a:t>精选观点</a:t>
             </a:r>
             <a:endParaRPr lang="zh-CN" altLang="en-US" sz="3200" dirty="0">
               <a:latin typeface="思源黑体 CN Light" panose="020B0300000000000000" pitchFamily="34" charset="-128"/>
